--- a/public/fun/pack/pptx/reviewpro/보장점검양식프리미엄_50_사업장점검_골든레드.pptx
+++ b/public/fun/pack/pptx/reviewpro/보장점검양식프리미엄_50_사업장점검_골든레드.pptx
@@ -112,12 +112,12 @@
   <p:extLst>
     <p:ext uri="{521415D9-36F7-43E2-AB2F-B90AF26B5E84}">
       <p14:sectionLst xmlns:p14="http://schemas.microsoft.com/office/powerpoint/2010/main">
-        <p14:section name="시작" id="{3911ECCC-3B3E-440B-8AF5-B9CDEEA256C6}">
+        <p14:section name="시작" id="{F6541A58-018B-42F8-AD72-0A90CF5535B0}">
           <p14:sldIdLst>
             <p14:sldId id="256"/>
           </p14:sldIdLst>
         </p14:section>
-        <p14:section name="본문" id="{4EFDDCC2-4E2F-4B43-B23C-9B8052D9684C}">
+        <p14:section name="본문" id="{64A77D99-9823-4E5F-8CAA-D85FDB3843B9}">
           <p14:sldIdLst>
             <p14:sldId id="257"/>
             <p14:sldId id="258"/>
@@ -1533,7 +1533,7 @@
             </a:lvl1pPr>
           </a:lstStyle>
           <a:p>
-            <a:fld id="{66AF6DFD-1A4D-48C0-83AB-E449B4CFFCA0}" type="slidenum">
+            <a:fld id="{D7779DC7-000B-4528-A004-F8108DCB9080}" type="slidenum">
               <a:rPr lang="en-US"/>
               <a:t>‹#›</a:t>
             </a:fld>
@@ -2193,7 +2193,7 @@
             </a:lvl1pPr>
           </a:lstStyle>
           <a:p>
-            <a:fld id="{F00E70CB-EC15-4676-B881-DC16E85F49A8}" type="slidenum">
+            <a:fld id="{FE1BD2B6-3D86-411A-AE05-371A29E3978E}" type="slidenum">
               <a:rPr lang="en-US"/>
               <a:t>‹#›</a:t>
             </a:fld>
@@ -2877,7 +2877,7 @@
             </a:lvl1pPr>
           </a:lstStyle>
           <a:p>
-            <a:fld id="{A8320D45-DF98-4A0E-B125-3FD83CF8FD90}" type="slidenum">
+            <a:fld id="{18467E89-D61F-4FF4-A5A7-C4CAB5B65568}" type="slidenum">
               <a:rPr lang="en-US"/>
               <a:t>‹#›</a:t>
             </a:fld>
@@ -3700,7 +3700,7 @@
           <a:p>
             <a:r>
               <a:rPr lang="ko-KR"/>
-              <a:t>새해 사업 계획 전에 점검합니다</a:t>
+              <a:t>사업 계획 전에 점검합니다</a:t>
             </a:r>
           </a:p>
         </p:txBody>
@@ -3722,7 +3722,7 @@
           <a:p>
             <a:r>
               <a:rPr lang="ko-KR"/>
-              <a:t>사업장 점검 · 0000. 00. 00</a:t>
+              <a:t>사업장 점검 · 날짜 입력</a:t>
             </a:r>
           </a:p>
           <a:p>
@@ -3813,7 +3813,7 @@
           <a:bodyPr/>
           <a:lstStyle/>
           <a:p>
-            <a:fld id="{44C4F986-C750-459D-90E0-B00F74AC4A25}" type="slidenum">
+            <a:fld id="{9BB2211E-6F5D-4749-B4F5-EEFED9CD3E50}" type="slidenum">
               <a:rPr lang="en-US"/>
               <a:t>‹#›</a:t>
             </a:fld>
@@ -4329,7 +4329,7 @@
           <a:bodyPr/>
           <a:lstStyle/>
           <a:p>
-            <a:fld id="{622ADAFD-10CA-42D3-BB16-92C843003555}" type="slidenum">
+            <a:fld id="{C743DA01-9218-4F8A-A621-7E0083C3B6E0}" type="slidenum">
               <a:rPr lang="en-US"/>
               <a:t>‹#›</a:t>
             </a:fld>
@@ -5835,7 +5835,7 @@
           <a:bodyPr/>
           <a:lstStyle/>
           <a:p>
-            <a:fld id="{437D793F-7EB6-4EA4-B2DB-68BDEFBEFA7A}" type="slidenum">
+            <a:fld id="{A05034B7-CAD3-4F81-BE46-B925C8237D94}" type="slidenum">
               <a:rPr lang="en-US"/>
               <a:t>‹#›</a:t>
             </a:fld>
@@ -7385,7 +7385,7 @@
           <a:bodyPr/>
           <a:lstStyle/>
           <a:p>
-            <a:fld id="{6E0C396B-1D28-41EE-9600-891D2C71D672}" type="slidenum">
+            <a:fld id="{CD63D2C4-EE90-4138-BC05-21C8A969E9F6}" type="slidenum">
               <a:rPr lang="en-US"/>
               <a:t>‹#›</a:t>
             </a:fld>
@@ -8262,7 +8262,7 @@
           <a:bodyPr/>
           <a:lstStyle/>
           <a:p>
-            <a:fld id="{B5BF8315-A130-437F-B069-ECF68841CADE}" type="slidenum">
+            <a:fld id="{C99E7318-C5EA-4951-852C-C60AB938AECC}" type="slidenum">
               <a:rPr lang="en-US"/>
               <a:t>‹#›</a:t>
             </a:fld>
